--- a/outputs/WDPR_Fall_2026_Case_Deck.pptx
+++ b/outputs/WDPR_Fall_2026_Case_Deck.pptx
@@ -5721,7 +5721,7 @@
                 <a:ea typeface="Calibri" pitchFamily="34" charset="-122"/>
                 <a:cs typeface="Calibri" pitchFamily="34" charset="-120"/>
               </a:rPr>
-              <a:t>Prepared for festival leadership   |   Team name   |   September 2026</a:t>
+              <a:t>DIsnEOR   |   September 2026</a:t>
             </a:r>
             <a:endParaRPr lang="en-US" sz="1100" dirty="0"/>
           </a:p>
